--- a/MLOps/01 - Вводное занятие/Presentation/01-Introduction_in_MLOps.pptx
+++ b/MLOps/01 - Вводное занятие/Presentation/01-Introduction_in_MLOps.pptx
@@ -15662,16 +15662,7 @@
                 <a:cs typeface="Roboto"/>
                 <a:sym typeface="Roboto"/>
               </a:rPr>
-              <a:t>MLOps-2025-0</a:t>
-            </a:r>
-            <a:r>
-              <a:rPr lang="ru-RU" sz="1400" b="1" dirty="0">
-                <a:latin typeface="Roboto"/>
-                <a:ea typeface="Roboto"/>
-                <a:cs typeface="Roboto"/>
-                <a:sym typeface="Roboto"/>
-              </a:rPr>
-              <a:t>9</a:t>
+              <a:t>MLOps-2025-12</a:t>
             </a:r>
             <a:endParaRPr sz="1300" b="1" dirty="0">
               <a:latin typeface="Roboto"/>

--- a/MLOps/01 - Вводное занятие/Presentation/01-Introduction_in_MLOps.pptx
+++ b/MLOps/01 - Вводное занятие/Presentation/01-Introduction_in_MLOps.pptx
@@ -15662,7 +15662,7 @@
                 <a:cs typeface="Roboto"/>
                 <a:sym typeface="Roboto"/>
               </a:rPr>
-              <a:t>MLOps-2025-12</a:t>
+              <a:t>MLOps-2026-03</a:t>
             </a:r>
             <a:endParaRPr sz="1300" b="1" dirty="0">
               <a:latin typeface="Roboto"/>
